--- a/EC_resources/tutorial/Git.pptx
+++ b/EC_resources/tutorial/Git.pptx
@@ -392,7 +392,7 @@
               <a:rPr lang="zh-CN" altLang="en-US" smtClean="0">
                 <a:latin typeface="Abadi" panose="020B0604020104020204" pitchFamily="34" charset="0"/>
               </a:rPr>
-              <a:t>2025/10/4</a:t>
+              <a:t>2025/10/6</a:t>
             </a:fld>
             <a:endParaRPr lang="zh-CN" altLang="en-US" dirty="0">
               <a:latin typeface="Abadi" panose="020B0604020104020204" pitchFamily="34" charset="0"/>
@@ -28776,7 +28776,7 @@
         </p:blipFill>
         <p:spPr>
           <a:xfrm>
-            <a:off x="2856198" y="1519914"/>
+            <a:off x="2822860" y="1580553"/>
             <a:ext cx="2479963" cy="917145"/>
           </a:xfrm>
           <a:prstGeom prst="rect">
@@ -29426,6 +29426,60 @@
               </a:rPr>
               <a:t>博客</a:t>
             </a:r>
+            <a:endParaRPr lang="en-US" altLang="zh-CN" dirty="0"/>
+          </a:p>
+          <a:p>
+            <a:pPr marL="139700" indent="0" algn="l">
+              <a:buNone/>
+            </a:pPr>
+            <a:r>
+              <a:rPr lang="en-US" altLang="zh-CN" dirty="0">
+                <a:hlinkClick r:id="rId5"/>
+              </a:rPr>
+              <a:t>	</a:t>
+            </a:r>
+            <a:r>
+              <a:rPr lang="zh-CN" altLang="en-US" dirty="0">
+                <a:hlinkClick r:id="rId5"/>
+              </a:rPr>
+              <a:t>详解</a:t>
+            </a:r>
+            <a:r>
+              <a:rPr lang="en-US" altLang="zh-CN" dirty="0">
+                <a:hlinkClick r:id="rId5"/>
+              </a:rPr>
+              <a:t>git rebase</a:t>
+            </a:r>
+            <a:r>
+              <a:rPr lang="zh-CN" altLang="en-US" dirty="0">
+                <a:hlinkClick r:id="rId5"/>
+              </a:rPr>
+              <a:t>，让你走上</a:t>
+            </a:r>
+            <a:r>
+              <a:rPr lang="en-US" altLang="zh-CN" dirty="0">
+                <a:hlinkClick r:id="rId5"/>
+              </a:rPr>
+              <a:t>git</a:t>
+            </a:r>
+            <a:r>
+              <a:rPr lang="zh-CN" altLang="en-US" dirty="0">
+                <a:hlinkClick r:id="rId5"/>
+              </a:rPr>
+              <a:t>大神之路 </a:t>
+            </a:r>
+            <a:r>
+              <a:rPr lang="en-US" altLang="zh-CN" dirty="0">
+                <a:hlinkClick r:id="rId5"/>
+              </a:rPr>
+              <a:t>- </a:t>
+            </a:r>
+            <a:r>
+              <a:rPr lang="zh-CN" altLang="en-US" dirty="0">
+                <a:hlinkClick r:id="rId5"/>
+              </a:rPr>
+              <a:t>知乎</a:t>
+            </a:r>
             <a:endParaRPr lang="zh-CN" altLang="en-US" dirty="0"/>
           </a:p>
         </p:txBody>
@@ -29445,7 +29499,7 @@
           <p:nvPr/>
         </p:nvPicPr>
         <p:blipFill>
-          <a:blip r:embed="rId5"/>
+          <a:blip r:embed="rId6"/>
           <a:stretch>
             <a:fillRect/>
           </a:stretch>
@@ -36443,22 +36497,22 @@
               <a:buNone/>
             </a:pPr>
             <a:r>
-              <a:rPr lang="en-US" altLang="zh-CN" sz="1400" dirty="0"/>
+              <a:rPr lang="en-US" altLang="zh-CN" sz="1200" dirty="0"/>
               <a:t>1.</a:t>
             </a:r>
             <a:r>
-              <a:rPr lang="zh-CN" altLang="en-US" sz="1400" dirty="0"/>
+              <a:rPr lang="zh-CN" altLang="en-US" sz="1200" dirty="0"/>
               <a:t>上面所列出的命令远不是</a:t>
             </a:r>
             <a:r>
-              <a:rPr lang="en-US" altLang="zh-CN" sz="1400" dirty="0"/>
+              <a:rPr lang="en-US" altLang="zh-CN" sz="1200" dirty="0"/>
               <a:t>git</a:t>
             </a:r>
             <a:r>
-              <a:rPr lang="zh-CN" altLang="en-US" sz="1400" dirty="0"/>
+              <a:rPr lang="zh-CN" altLang="en-US" sz="1200" dirty="0"/>
               <a:t>的全部内容，鼓励大家继续去探索</a:t>
             </a:r>
-            <a:endParaRPr lang="en-US" altLang="zh-CN" sz="1400" dirty="0"/>
+            <a:endParaRPr lang="en-US" altLang="zh-CN" sz="1200" dirty="0"/>
           </a:p>
           <a:p>
             <a:pPr marL="0" lvl="0" indent="0" algn="ctr" rtl="0">
@@ -36470,7 +36524,7 @@
               </a:spcAft>
               <a:buNone/>
             </a:pPr>
-            <a:endParaRPr lang="en-GB" sz="1400" dirty="0"/>
+            <a:endParaRPr lang="en-GB" sz="1200" dirty="0"/>
           </a:p>
           <a:p>
             <a:pPr marL="0" lvl="0" indent="0" algn="ctr" rtl="0">
@@ -36483,14 +36537,14 @@
               <a:buNone/>
             </a:pPr>
             <a:r>
-              <a:rPr lang="en-US" altLang="zh-CN" sz="1400" dirty="0"/>
+              <a:rPr lang="en-US" altLang="zh-CN" sz="1200" dirty="0"/>
               <a:t>2.</a:t>
             </a:r>
             <a:r>
-              <a:rPr lang="zh-CN" altLang="en-US" sz="1400" dirty="0"/>
+              <a:rPr lang="zh-CN" altLang="en-US" sz="1200" dirty="0"/>
               <a:t>但是如果只是日常使用的话  核心命令部分基本够用  剩下的可以等需要用了再去学</a:t>
             </a:r>
-            <a:endParaRPr lang="en-US" altLang="zh-CN" sz="1400" dirty="0"/>
+            <a:endParaRPr lang="en-US" altLang="zh-CN" sz="1200" dirty="0"/>
           </a:p>
           <a:p>
             <a:pPr marL="0" lvl="0" indent="0" algn="ctr" rtl="0">
@@ -36502,7 +36556,7 @@
               </a:spcAft>
               <a:buNone/>
             </a:pPr>
-            <a:endParaRPr lang="en-US" sz="1400" dirty="0"/>
+            <a:endParaRPr lang="en-US" sz="1200" dirty="0"/>
           </a:p>
           <a:p>
             <a:pPr marL="0" lvl="0" indent="0" algn="ctr" rtl="0">
@@ -36515,30 +36569,30 @@
               <a:buNone/>
             </a:pPr>
             <a:r>
-              <a:rPr lang="en-US" altLang="zh-CN" sz="1400" dirty="0"/>
+              <a:rPr lang="en-US" altLang="zh-CN" sz="1200" dirty="0"/>
               <a:t>3.</a:t>
             </a:r>
             <a:r>
-              <a:rPr lang="zh-CN" altLang="en-US" sz="1400" dirty="0"/>
+              <a:rPr lang="zh-CN" altLang="en-US" sz="1200" dirty="0"/>
               <a:t>上面所涉及的命令基本都包括了</a:t>
             </a:r>
             <a:r>
-              <a:rPr lang="en-US" altLang="zh-CN" sz="1400" dirty="0" err="1"/>
+              <a:rPr lang="en-US" altLang="zh-CN" sz="1200" dirty="0" err="1"/>
               <a:t>vscode</a:t>
             </a:r>
             <a:r>
-              <a:rPr lang="zh-CN" altLang="en-US" sz="1400" dirty="0"/>
+              <a:rPr lang="zh-CN" altLang="en-US" sz="1200" dirty="0"/>
               <a:t>中的操作和命令行两种方式，大家可以选用自己喜欢的方式，</a:t>
             </a:r>
             <a:r>
-              <a:rPr lang="en-US" altLang="zh-CN" sz="1400" dirty="0" err="1"/>
+              <a:rPr lang="en-US" altLang="zh-CN" sz="1200" dirty="0" err="1"/>
               <a:t>vscode</a:t>
             </a:r>
             <a:r>
-              <a:rPr lang="zh-CN" altLang="en-US" sz="1400" dirty="0"/>
+              <a:rPr lang="zh-CN" altLang="en-US" sz="1200" dirty="0"/>
               <a:t>是可视化的，好上手，但是对有些操作来说命令行可以更灵活。</a:t>
             </a:r>
-            <a:endParaRPr lang="en-US" altLang="zh-CN" sz="1400" dirty="0"/>
+            <a:endParaRPr lang="en-US" altLang="zh-CN" sz="1200" dirty="0"/>
           </a:p>
           <a:p>
             <a:pPr marL="0" lvl="0" indent="0" algn="ctr" rtl="0">
@@ -36550,7 +36604,7 @@
               </a:spcAft>
               <a:buNone/>
             </a:pPr>
-            <a:endParaRPr lang="en-US" sz="1400" dirty="0"/>
+            <a:endParaRPr lang="en-US" altLang="zh-CN" sz="1200" dirty="0"/>
           </a:p>
           <a:p>
             <a:pPr marL="0" lvl="0" indent="0" algn="ctr" rtl="0">
@@ -36563,22 +36617,65 @@
               <a:buNone/>
             </a:pPr>
             <a:r>
-              <a:rPr lang="en-US" sz="1400" dirty="0"/>
+              <a:rPr lang="en-US" altLang="zh-CN" sz="1200" dirty="0"/>
               <a:t>4.</a:t>
             </a:r>
             <a:r>
-              <a:rPr lang="zh-CN" altLang="en-US" sz="1400" dirty="0"/>
+              <a:rPr lang="zh-CN" altLang="en-US" sz="1200" dirty="0"/>
+              <a:t>分享一个超好用的</a:t>
+            </a:r>
+            <a:r>
+              <a:rPr lang="en-US" altLang="zh-CN" sz="1200" dirty="0"/>
+              <a:t>git</a:t>
+            </a:r>
+            <a:r>
+              <a:rPr lang="zh-CN" altLang="en-US" sz="1200" dirty="0"/>
+              <a:t>学习小网站：</a:t>
+            </a:r>
+            <a:r>
+              <a:rPr lang="en-US" altLang="zh-CN" sz="1200" dirty="0"/>
+              <a:t>https://learngitbranching.js.org/?locale=zh_CN</a:t>
+            </a:r>
+          </a:p>
+          <a:p>
+            <a:pPr marL="0" lvl="0" indent="0" algn="ctr" rtl="0">
+              <a:spcBef>
+                <a:spcPts val="0"/>
+              </a:spcBef>
+              <a:spcAft>
+                <a:spcPts val="0"/>
+              </a:spcAft>
+              <a:buNone/>
+            </a:pPr>
+            <a:endParaRPr lang="en-US" sz="1200" dirty="0"/>
+          </a:p>
+          <a:p>
+            <a:pPr marL="0" lvl="0" indent="0" algn="ctr" rtl="0">
+              <a:spcBef>
+                <a:spcPts val="0"/>
+              </a:spcBef>
+              <a:spcAft>
+                <a:spcPts val="0"/>
+              </a:spcAft>
+              <a:buNone/>
+            </a:pPr>
+            <a:r>
+              <a:rPr lang="en-US" sz="1200" dirty="0"/>
+              <a:t>5.</a:t>
+            </a:r>
+            <a:r>
+              <a:rPr lang="zh-CN" altLang="en-US" sz="1200" dirty="0"/>
               <a:t>最后再推荐一下这几个好用的插件</a:t>
             </a:r>
             <a:r>
-              <a:rPr lang="en-US" altLang="zh-CN" sz="1400" dirty="0"/>
+              <a:rPr lang="en-US" altLang="zh-CN" sz="1200" dirty="0"/>
               <a:t>,</a:t>
             </a:r>
             <a:r>
-              <a:rPr lang="zh-CN" altLang="en-US" sz="1400" dirty="0"/>
+              <a:rPr lang="zh-CN" altLang="en-US" sz="1200" dirty="0"/>
               <a:t>具体用法可以上网细查</a:t>
             </a:r>
-            <a:endParaRPr lang="en-US" altLang="zh-CN" sz="1400" dirty="0"/>
+            <a:endParaRPr lang="en-US" altLang="zh-CN" sz="1200" dirty="0"/>
           </a:p>
           <a:p>
             <a:pPr marL="0" lvl="0" indent="0" algn="ctr" rtl="0">
@@ -38190,7 +38287,7 @@
         </p:blipFill>
         <p:spPr>
           <a:xfrm>
-            <a:off x="962311" y="3623760"/>
+            <a:off x="746005" y="3727790"/>
             <a:ext cx="4115374" cy="628738"/>
           </a:xfrm>
           <a:prstGeom prst="rect">
@@ -38220,7 +38317,7 @@
         </p:blipFill>
         <p:spPr>
           <a:xfrm>
-            <a:off x="2687781" y="3652037"/>
+            <a:off x="2822562" y="3707152"/>
             <a:ext cx="4305901" cy="704948"/>
           </a:xfrm>
           <a:prstGeom prst="rect">
@@ -38250,7 +38347,7 @@
         </p:blipFill>
         <p:spPr>
           <a:xfrm>
-            <a:off x="4372606" y="3718721"/>
+            <a:off x="4897893" y="3701186"/>
             <a:ext cx="4191585" cy="638264"/>
           </a:xfrm>
           <a:prstGeom prst="rect">
